--- a/KHBD_Tin_học/Tiền_tiểu_học/Tuần_02/Slide_Tin_hoc_Tien_TH_Bai01_May_tinh_xung_quanh_em.pptx
+++ b/KHBD_Tin_học/Tiền_tiểu_học/Tuần_02/Slide_Tin_hoc_Tien_TH_Bai01_May_tinh_xung_quanh_em.pptx
@@ -3389,6 +3389,12 @@
 <p:sld xmlns:a="http://schemas.openxmlformats.org/drawingml/2006/main" xmlns:p="http://schemas.openxmlformats.org/presentationml/2006/main" xmlns:r="http://schemas.openxmlformats.org/officeDocument/2006/relationships">
   <p:cSld>
     <p:spTree>
+      <p:nvGrpSpPr>
+        <p:cNvPr id="1" name=""/>
+        <p:cNvGrpSpPr/>
+        <p:nvPr/>
+      </p:nvGrpSpPr>
+      <p:grpSpPr/>
       <p:sp>
         <p:nvSpPr>
           <p:cNvPr id="3" name="Rectangle 2"/>
@@ -3475,12 +3481,6 @@
           </a:p>
         </p:txBody>
       </p:sp>
-      <p:nvGrpSpPr>
-        <p:cNvPr id="1" name=""/>
-        <p:cNvGrpSpPr/>
-        <p:nvPr/>
-      </p:nvGrpSpPr>
-      <p:grpSpPr/>
       <p:sp>
         <p:nvSpPr>
           <p:cNvPr id="4" name="TextBox 3"/>
@@ -3590,6 +3590,12 @@
 <p:sld xmlns:a="http://schemas.openxmlformats.org/drawingml/2006/main" xmlns:p="http://schemas.openxmlformats.org/presentationml/2006/main" xmlns:r="http://schemas.openxmlformats.org/officeDocument/2006/relationships">
   <p:cSld>
     <p:spTree>
+      <p:nvGrpSpPr>
+        <p:cNvPr id="1" name=""/>
+        <p:cNvGrpSpPr/>
+        <p:nvPr/>
+      </p:nvGrpSpPr>
+      <p:grpSpPr/>
       <p:sp>
         <p:nvSpPr>
           <p:cNvPr id="2" name="Rectangle 1"/>
@@ -3633,12 +3639,6 @@
           </a:p>
         </p:txBody>
       </p:sp>
-      <p:nvGrpSpPr>
-        <p:cNvPr id="1" name=""/>
-        <p:cNvGrpSpPr/>
-        <p:nvPr/>
-      </p:nvGrpSpPr>
-      <p:grpSpPr/>
       <p:sp>
         <p:nvSpPr>
           <p:cNvPr id="3" name="Rectangle 2"/>
@@ -3932,6 +3932,12 @@
 <p:sld xmlns:a="http://schemas.openxmlformats.org/drawingml/2006/main" xmlns:p="http://schemas.openxmlformats.org/presentationml/2006/main" xmlns:r="http://schemas.openxmlformats.org/officeDocument/2006/relationships">
   <p:cSld>
     <p:spTree>
+      <p:nvGrpSpPr>
+        <p:cNvPr id="1" name=""/>
+        <p:cNvGrpSpPr/>
+        <p:nvPr/>
+      </p:nvGrpSpPr>
+      <p:grpSpPr/>
       <p:sp>
         <p:nvSpPr>
           <p:cNvPr id="2" name="Rectangle 1"/>
@@ -3975,12 +3981,6 @@
           </a:p>
         </p:txBody>
       </p:sp>
-      <p:nvGrpSpPr>
-        <p:cNvPr id="1" name=""/>
-        <p:cNvGrpSpPr/>
-        <p:nvPr/>
-      </p:nvGrpSpPr>
-      <p:grpSpPr/>
       <p:sp>
         <p:nvSpPr>
           <p:cNvPr id="3" name="Rectangle 2"/>
@@ -4306,6 +4306,12 @@
 <p:sld xmlns:a="http://schemas.openxmlformats.org/drawingml/2006/main" xmlns:p="http://schemas.openxmlformats.org/presentationml/2006/main" xmlns:r="http://schemas.openxmlformats.org/officeDocument/2006/relationships">
   <p:cSld>
     <p:spTree>
+      <p:nvGrpSpPr>
+        <p:cNvPr id="1" name=""/>
+        <p:cNvGrpSpPr/>
+        <p:nvPr/>
+      </p:nvGrpSpPr>
+      <p:grpSpPr/>
       <p:sp>
         <p:nvSpPr>
           <p:cNvPr id="2" name="Rectangle 1"/>
@@ -4349,12 +4355,6 @@
           </a:p>
         </p:txBody>
       </p:sp>
-      <p:nvGrpSpPr>
-        <p:cNvPr id="1" name=""/>
-        <p:cNvGrpSpPr/>
-        <p:nvPr/>
-      </p:nvGrpSpPr>
-      <p:grpSpPr/>
       <p:sp>
         <p:nvSpPr>
           <p:cNvPr id="3" name="Rectangle 2"/>
@@ -4680,6 +4680,12 @@
 <p:sld xmlns:a="http://schemas.openxmlformats.org/drawingml/2006/main" xmlns:p="http://schemas.openxmlformats.org/presentationml/2006/main" xmlns:r="http://schemas.openxmlformats.org/officeDocument/2006/relationships">
   <p:cSld>
     <p:spTree>
+      <p:nvGrpSpPr>
+        <p:cNvPr id="1" name=""/>
+        <p:cNvGrpSpPr/>
+        <p:nvPr/>
+      </p:nvGrpSpPr>
+      <p:grpSpPr/>
       <p:sp>
         <p:nvSpPr>
           <p:cNvPr id="2" name="Rectangle 1"/>
@@ -4723,12 +4729,6 @@
           </a:p>
         </p:txBody>
       </p:sp>
-      <p:nvGrpSpPr>
-        <p:cNvPr id="1" name=""/>
-        <p:cNvGrpSpPr/>
-        <p:nvPr/>
-      </p:nvGrpSpPr>
-      <p:grpSpPr/>
       <p:sp>
         <p:nvSpPr>
           <p:cNvPr id="3" name="Rectangle 2"/>
@@ -5054,6 +5054,12 @@
 <p:sld xmlns:a="http://schemas.openxmlformats.org/drawingml/2006/main" xmlns:p="http://schemas.openxmlformats.org/presentationml/2006/main" xmlns:r="http://schemas.openxmlformats.org/officeDocument/2006/relationships">
   <p:cSld>
     <p:spTree>
+      <p:nvGrpSpPr>
+        <p:cNvPr id="1" name=""/>
+        <p:cNvGrpSpPr/>
+        <p:nvPr/>
+      </p:nvGrpSpPr>
+      <p:grpSpPr/>
       <p:sp>
         <p:nvSpPr>
           <p:cNvPr id="2" name="Rectangle 1"/>
@@ -5097,12 +5103,6 @@
           </a:p>
         </p:txBody>
       </p:sp>
-      <p:nvGrpSpPr>
-        <p:cNvPr id="1" name=""/>
-        <p:cNvGrpSpPr/>
-        <p:nvPr/>
-      </p:nvGrpSpPr>
-      <p:grpSpPr/>
       <p:sp>
         <p:nvSpPr>
           <p:cNvPr id="3" name="Rectangle 2"/>
@@ -5526,6 +5526,12 @@
 <p:sld xmlns:a="http://schemas.openxmlformats.org/drawingml/2006/main" xmlns:p="http://schemas.openxmlformats.org/presentationml/2006/main" xmlns:r="http://schemas.openxmlformats.org/officeDocument/2006/relationships">
   <p:cSld>
     <p:spTree>
+      <p:nvGrpSpPr>
+        <p:cNvPr id="1" name=""/>
+        <p:cNvGrpSpPr/>
+        <p:nvPr/>
+      </p:nvGrpSpPr>
+      <p:grpSpPr/>
       <p:sp>
         <p:nvSpPr>
           <p:cNvPr id="2" name="Rectangle 1"/>
@@ -5569,12 +5575,6 @@
           </a:p>
         </p:txBody>
       </p:sp>
-      <p:nvGrpSpPr>
-        <p:cNvPr id="1" name=""/>
-        <p:cNvGrpSpPr/>
-        <p:nvPr/>
-      </p:nvGrpSpPr>
-      <p:grpSpPr/>
       <p:sp>
         <p:nvSpPr>
           <p:cNvPr id="3" name="Rectangle 2"/>
@@ -5774,6 +5774,12 @@
 <p:sld xmlns:a="http://schemas.openxmlformats.org/drawingml/2006/main" xmlns:p="http://schemas.openxmlformats.org/presentationml/2006/main" xmlns:r="http://schemas.openxmlformats.org/officeDocument/2006/relationships">
   <p:cSld>
     <p:spTree>
+      <p:nvGrpSpPr>
+        <p:cNvPr id="1" name=""/>
+        <p:cNvGrpSpPr/>
+        <p:nvPr/>
+      </p:nvGrpSpPr>
+      <p:grpSpPr/>
       <p:sp>
         <p:nvSpPr>
           <p:cNvPr id="2" name="Rectangle 1"/>
@@ -5817,12 +5823,6 @@
           </a:p>
         </p:txBody>
       </p:sp>
-      <p:nvGrpSpPr>
-        <p:cNvPr id="1" name=""/>
-        <p:cNvGrpSpPr/>
-        <p:nvPr/>
-      </p:nvGrpSpPr>
-      <p:grpSpPr/>
       <p:sp>
         <p:nvSpPr>
           <p:cNvPr id="3" name="Rounded Rectangle 2"/>
@@ -6365,6 +6365,12 @@
 <p:sld xmlns:a="http://schemas.openxmlformats.org/drawingml/2006/main" xmlns:p="http://schemas.openxmlformats.org/presentationml/2006/main" xmlns:r="http://schemas.openxmlformats.org/officeDocument/2006/relationships">
   <p:cSld>
     <p:spTree>
+      <p:nvGrpSpPr>
+        <p:cNvPr id="1" name=""/>
+        <p:cNvGrpSpPr/>
+        <p:nvPr/>
+      </p:nvGrpSpPr>
+      <p:grpSpPr/>
       <p:sp>
         <p:nvSpPr>
           <p:cNvPr id="2" name="Rectangle 1"/>
@@ -6408,12 +6414,6 @@
           </a:p>
         </p:txBody>
       </p:sp>
-      <p:nvGrpSpPr>
-        <p:cNvPr id="1" name=""/>
-        <p:cNvGrpSpPr/>
-        <p:nvPr/>
-      </p:nvGrpSpPr>
-      <p:grpSpPr/>
       <p:sp>
         <p:nvSpPr>
           <p:cNvPr id="3" name="TextBox 2"/>
